--- a/presentation/Moffat-Bay-Lodge.pptx
+++ b/presentation/Moffat-Bay-Lodge.pptx
@@ -5,7 +5,7 @@
     <p:sldMasterId id="2147483648" r:id="rId4"/>
   </p:sldMasterIdLst>
   <p:notesMasterIdLst>
-    <p:notesMasterId r:id="rId24"/>
+    <p:notesMasterId r:id="rId30"/>
   </p:notesMasterIdLst>
   <p:sldIdLst>
     <p:sldId id="256" r:id="rId5"/>
@@ -27,6 +27,12 @@
     <p:sldId id="273" r:id="rId21"/>
     <p:sldId id="274" r:id="rId22"/>
     <p:sldId id="275" r:id="rId23"/>
+    <p:sldId id="276" r:id="rId24"/>
+    <p:sldId id="277" r:id="rId25"/>
+    <p:sldId id="278" r:id="rId26"/>
+    <p:sldId id="279" r:id="rId27"/>
+    <p:sldId id="281" r:id="rId28"/>
+    <p:sldId id="280" r:id="rId29"/>
   </p:sldIdLst>
   <p:sldSz cx="12192000" cy="6858000"/>
   <p:notesSz cx="6858000" cy="9144000"/>
@@ -354,7 +360,7 @@
           <a:p>
             <a:fld id="{9BCA1836-4B9F-4E98-BE9C-D90EDA982E36}" type="datetimeFigureOut">
               <a:rPr lang="en-US" smtClean="0"/>
-              <a:t>10/1/2026</a:t>
+              <a:t>10/4/2026</a:t>
             </a:fld>
             <a:endParaRPr lang="en-US"/>
           </a:p>
@@ -665,6 +671,90 @@
           <a:bodyPr/>
           <a:lstStyle/>
           <a:p>
+            <a:endParaRPr lang="en-US" dirty="0"/>
+          </a:p>
+        </p:txBody>
+      </p:sp>
+      <p:sp>
+        <p:nvSpPr>
+          <p:cNvPr id="4" name="Slide Number Placeholder 3"/>
+          <p:cNvSpPr>
+            <a:spLocks noGrp="1"/>
+          </p:cNvSpPr>
+          <p:nvPr>
+            <p:ph type="sldNum" sz="quarter" idx="5"/>
+          </p:nvPr>
+        </p:nvSpPr>
+        <p:spPr/>
+        <p:txBody>
+          <a:bodyPr/>
+          <a:lstStyle/>
+          <a:p>
+            <a:fld id="{DD7D0708-C1E6-4792-A3C6-6B91C711FB3D}" type="slidenum">
+              <a:rPr lang="en-US" smtClean="0"/>
+              <a:t>4</a:t>
+            </a:fld>
+            <a:endParaRPr lang="en-US"/>
+          </a:p>
+        </p:txBody>
+      </p:sp>
+    </p:spTree>
+    <p:extLst>
+      <p:ext uri="{BB962C8B-B14F-4D97-AF65-F5344CB8AC3E}">
+        <p14:creationId xmlns:p14="http://schemas.microsoft.com/office/powerpoint/2010/main" val="293144859"/>
+      </p:ext>
+    </p:extLst>
+  </p:cSld>
+  <p:clrMapOvr>
+    <a:masterClrMapping/>
+  </p:clrMapOvr>
+</p:notes>
+</file>
+
+<file path=ppt/notesSlides/notesSlide2.xml><?xml version="1.0" encoding="utf-8"?>
+<p:notes xmlns:a="http://schemas.openxmlformats.org/drawingml/2006/main" xmlns:r="http://schemas.openxmlformats.org/officeDocument/2006/relationships" xmlns:p="http://schemas.openxmlformats.org/presentationml/2006/main">
+  <p:cSld>
+    <p:spTree>
+      <p:nvGrpSpPr>
+        <p:cNvPr id="1" name=""/>
+        <p:cNvGrpSpPr/>
+        <p:nvPr/>
+      </p:nvGrpSpPr>
+      <p:grpSpPr>
+        <a:xfrm>
+          <a:off x="0" y="0"/>
+          <a:ext cx="0" cy="0"/>
+          <a:chOff x="0" y="0"/>
+          <a:chExt cx="0" cy="0"/>
+        </a:xfrm>
+      </p:grpSpPr>
+      <p:sp>
+        <p:nvSpPr>
+          <p:cNvPr id="2" name="Slide Image Placeholder 1"/>
+          <p:cNvSpPr>
+            <a:spLocks noGrp="1" noRot="1" noChangeAspect="1"/>
+          </p:cNvSpPr>
+          <p:nvPr>
+            <p:ph type="sldImg"/>
+          </p:nvPr>
+        </p:nvSpPr>
+        <p:spPr/>
+      </p:sp>
+      <p:sp>
+        <p:nvSpPr>
+          <p:cNvPr id="3" name="Notes Placeholder 2"/>
+          <p:cNvSpPr>
+            <a:spLocks noGrp="1"/>
+          </p:cNvSpPr>
+          <p:nvPr>
+            <p:ph type="body" idx="1"/>
+          </p:nvPr>
+        </p:nvSpPr>
+        <p:spPr/>
+        <p:txBody>
+          <a:bodyPr/>
+          <a:lstStyle/>
+          <a:p>
             <a:r>
               <a:rPr lang="en-US" dirty="0"/>
               <a:t>All Tests Can be Accessed Here: </a:t>
@@ -739,7 +829,7 @@
 </p:notes>
 </file>
 
-<file path=ppt/notesSlides/notesSlide2.xml><?xml version="1.0" encoding="utf-8"?>
+<file path=ppt/notesSlides/notesSlide3.xml><?xml version="1.0" encoding="utf-8"?>
 <p:notes xmlns:a="http://schemas.openxmlformats.org/drawingml/2006/main" xmlns:r="http://schemas.openxmlformats.org/officeDocument/2006/relationships" xmlns:p="http://schemas.openxmlformats.org/presentationml/2006/main">
   <p:cSld>
     <p:spTree>
@@ -1004,7 +1094,7 @@
           <a:p>
             <a:fld id="{3F2F8F12-37FF-4156-98CA-C6BAABB58D6F}" type="datetimeFigureOut">
               <a:rPr lang="en-US" smtClean="0"/>
-              <a:t>10/1/2026</a:t>
+              <a:t>10/4/2026</a:t>
             </a:fld>
             <a:endParaRPr lang="en-US"/>
           </a:p>
@@ -1202,7 +1292,7 @@
           <a:p>
             <a:fld id="{3F2F8F12-37FF-4156-98CA-C6BAABB58D6F}" type="datetimeFigureOut">
               <a:rPr lang="en-US" smtClean="0"/>
-              <a:t>10/1/2026</a:t>
+              <a:t>10/4/2026</a:t>
             </a:fld>
             <a:endParaRPr lang="en-US"/>
           </a:p>
@@ -1410,7 +1500,7 @@
           <a:p>
             <a:fld id="{3F2F8F12-37FF-4156-98CA-C6BAABB58D6F}" type="datetimeFigureOut">
               <a:rPr lang="en-US" smtClean="0"/>
-              <a:t>10/1/2026</a:t>
+              <a:t>10/4/2026</a:t>
             </a:fld>
             <a:endParaRPr lang="en-US"/>
           </a:p>
@@ -1608,7 +1698,7 @@
           <a:p>
             <a:fld id="{3F2F8F12-37FF-4156-98CA-C6BAABB58D6F}" type="datetimeFigureOut">
               <a:rPr lang="en-US" smtClean="0"/>
-              <a:t>10/1/2026</a:t>
+              <a:t>10/4/2026</a:t>
             </a:fld>
             <a:endParaRPr lang="en-US"/>
           </a:p>
@@ -1883,7 +1973,7 @@
           <a:p>
             <a:fld id="{3F2F8F12-37FF-4156-98CA-C6BAABB58D6F}" type="datetimeFigureOut">
               <a:rPr lang="en-US" smtClean="0"/>
-              <a:t>10/1/2026</a:t>
+              <a:t>10/4/2026</a:t>
             </a:fld>
             <a:endParaRPr lang="en-US"/>
           </a:p>
@@ -2148,7 +2238,7 @@
           <a:p>
             <a:fld id="{3F2F8F12-37FF-4156-98CA-C6BAABB58D6F}" type="datetimeFigureOut">
               <a:rPr lang="en-US" smtClean="0"/>
-              <a:t>10/1/2026</a:t>
+              <a:t>10/4/2026</a:t>
             </a:fld>
             <a:endParaRPr lang="en-US"/>
           </a:p>
@@ -2560,7 +2650,7 @@
           <a:p>
             <a:fld id="{3F2F8F12-37FF-4156-98CA-C6BAABB58D6F}" type="datetimeFigureOut">
               <a:rPr lang="en-US" smtClean="0"/>
-              <a:t>10/1/2026</a:t>
+              <a:t>10/4/2026</a:t>
             </a:fld>
             <a:endParaRPr lang="en-US"/>
           </a:p>
@@ -2701,7 +2791,7 @@
           <a:p>
             <a:fld id="{3F2F8F12-37FF-4156-98CA-C6BAABB58D6F}" type="datetimeFigureOut">
               <a:rPr lang="en-US" smtClean="0"/>
-              <a:t>10/1/2026</a:t>
+              <a:t>10/4/2026</a:t>
             </a:fld>
             <a:endParaRPr lang="en-US"/>
           </a:p>
@@ -2814,7 +2904,7 @@
           <a:p>
             <a:fld id="{3F2F8F12-37FF-4156-98CA-C6BAABB58D6F}" type="datetimeFigureOut">
               <a:rPr lang="en-US" smtClean="0"/>
-              <a:t>10/1/2026</a:t>
+              <a:t>10/4/2026</a:t>
             </a:fld>
             <a:endParaRPr lang="en-US"/>
           </a:p>
@@ -3125,7 +3215,7 @@
           <a:p>
             <a:fld id="{3F2F8F12-37FF-4156-98CA-C6BAABB58D6F}" type="datetimeFigureOut">
               <a:rPr lang="en-US" smtClean="0"/>
-              <a:t>10/1/2026</a:t>
+              <a:t>10/4/2026</a:t>
             </a:fld>
             <a:endParaRPr lang="en-US"/>
           </a:p>
@@ -3413,7 +3503,7 @@
           <a:p>
             <a:fld id="{3F2F8F12-37FF-4156-98CA-C6BAABB58D6F}" type="datetimeFigureOut">
               <a:rPr lang="en-US" smtClean="0"/>
-              <a:t>10/1/2026</a:t>
+              <a:t>10/4/2026</a:t>
             </a:fld>
             <a:endParaRPr lang="en-US"/>
           </a:p>
@@ -3654,7 +3744,7 @@
           <a:p>
             <a:fld id="{3F2F8F12-37FF-4156-98CA-C6BAABB58D6F}" type="datetimeFigureOut">
               <a:rPr lang="en-US" smtClean="0"/>
-              <a:t>10/1/2026</a:t>
+              <a:t>10/4/2026</a:t>
             </a:fld>
             <a:endParaRPr lang="en-US"/>
           </a:p>
@@ -6575,31 +6665,31 @@
           <a:p>
             <a:r>
               <a:rPr lang="en-US" sz="2200" dirty="0"/>
-              <a:t>Unique Code		  					Slide 20 – </a:t>
+              <a:t>Unique Code		  					Slide 	20 - 21</a:t>
             </a:r>
           </a:p>
           <a:p>
             <a:r>
               <a:rPr lang="en-US" sz="2200" dirty="0"/>
-              <a:t>Lessons Learned As a Team</a:t>
+              <a:t>What Went Well						Slide	22</a:t>
             </a:r>
           </a:p>
           <a:p>
             <a:r>
               <a:rPr lang="en-US" sz="2200" dirty="0"/>
-              <a:t>What Went Well</a:t>
+              <a:t>What Went Wrong						Slide 	23</a:t>
             </a:r>
           </a:p>
           <a:p>
             <a:r>
               <a:rPr lang="en-US" sz="2200" dirty="0"/>
-              <a:t>What Went Wrong</a:t>
+              <a:t>Lessons Learned As a Team					Slide	24</a:t>
             </a:r>
           </a:p>
           <a:p>
             <a:r>
               <a:rPr lang="en-US" sz="2200" dirty="0"/>
-              <a:t>Conclusion</a:t>
+              <a:t>Conclusion							Slide	25</a:t>
             </a:r>
           </a:p>
         </p:txBody>
@@ -6608,6 +6698,529 @@
     <p:extLst>
       <p:ext uri="{BB962C8B-B14F-4D97-AF65-F5344CB8AC3E}">
         <p14:creationId xmlns:p14="http://schemas.microsoft.com/office/powerpoint/2010/main" val="625037553"/>
+      </p:ext>
+    </p:extLst>
+  </p:cSld>
+  <p:clrMapOvr>
+    <a:masterClrMapping/>
+  </p:clrMapOvr>
+</p:sld>
+</file>
+
+<file path=ppt/slides/slide20.xml><?xml version="1.0" encoding="utf-8"?>
+<p:sld xmlns:a="http://schemas.openxmlformats.org/drawingml/2006/main" xmlns:r="http://schemas.openxmlformats.org/officeDocument/2006/relationships" xmlns:p="http://schemas.openxmlformats.org/presentationml/2006/main">
+  <p:cSld>
+    <p:spTree>
+      <p:nvGrpSpPr>
+        <p:cNvPr id="1" name=""/>
+        <p:cNvGrpSpPr/>
+        <p:nvPr/>
+      </p:nvGrpSpPr>
+      <p:grpSpPr>
+        <a:xfrm>
+          <a:off x="0" y="0"/>
+          <a:ext cx="0" cy="0"/>
+          <a:chOff x="0" y="0"/>
+          <a:chExt cx="0" cy="0"/>
+        </a:xfrm>
+      </p:grpSpPr>
+      <p:sp>
+        <p:nvSpPr>
+          <p:cNvPr id="2" name="Title 1">
+            <a:extLst>
+              <a:ext uri="{FF2B5EF4-FFF2-40B4-BE49-F238E27FC236}">
+                <a16:creationId xmlns:a16="http://schemas.microsoft.com/office/drawing/2014/main" id="{9FC4407F-0F80-841E-20AA-691D08E0A4D2}"/>
+              </a:ext>
+            </a:extLst>
+          </p:cNvPr>
+          <p:cNvSpPr>
+            <a:spLocks noGrp="1"/>
+          </p:cNvSpPr>
+          <p:nvPr>
+            <p:ph type="title"/>
+          </p:nvPr>
+        </p:nvSpPr>
+        <p:spPr/>
+        <p:txBody>
+          <a:bodyPr/>
+          <a:lstStyle/>
+          <a:p>
+            <a:r>
+              <a:rPr lang="en-US" dirty="0"/>
+              <a:t>Unique Code</a:t>
+            </a:r>
+          </a:p>
+        </p:txBody>
+      </p:sp>
+      <p:sp>
+        <p:nvSpPr>
+          <p:cNvPr id="3" name="Content Placeholder 2">
+            <a:extLst>
+              <a:ext uri="{FF2B5EF4-FFF2-40B4-BE49-F238E27FC236}">
+                <a16:creationId xmlns:a16="http://schemas.microsoft.com/office/drawing/2014/main" id="{88AFD6C5-6B11-F882-E79B-D9288BD242DC}"/>
+              </a:ext>
+            </a:extLst>
+          </p:cNvPr>
+          <p:cNvSpPr>
+            <a:spLocks noGrp="1"/>
+          </p:cNvSpPr>
+          <p:nvPr>
+            <p:ph idx="1"/>
+          </p:nvPr>
+        </p:nvSpPr>
+        <p:spPr/>
+        <p:txBody>
+          <a:bodyPr/>
+          <a:lstStyle/>
+          <a:p>
+            <a:endParaRPr lang="en-US"/>
+          </a:p>
+        </p:txBody>
+      </p:sp>
+    </p:spTree>
+    <p:extLst>
+      <p:ext uri="{BB962C8B-B14F-4D97-AF65-F5344CB8AC3E}">
+        <p14:creationId xmlns:p14="http://schemas.microsoft.com/office/powerpoint/2010/main" val="3731372714"/>
+      </p:ext>
+    </p:extLst>
+  </p:cSld>
+  <p:clrMapOvr>
+    <a:masterClrMapping/>
+  </p:clrMapOvr>
+</p:sld>
+</file>
+
+<file path=ppt/slides/slide21.xml><?xml version="1.0" encoding="utf-8"?>
+<p:sld xmlns:a="http://schemas.openxmlformats.org/drawingml/2006/main" xmlns:r="http://schemas.openxmlformats.org/officeDocument/2006/relationships" xmlns:p="http://schemas.openxmlformats.org/presentationml/2006/main">
+  <p:cSld>
+    <p:spTree>
+      <p:nvGrpSpPr>
+        <p:cNvPr id="1" name=""/>
+        <p:cNvGrpSpPr/>
+        <p:nvPr/>
+      </p:nvGrpSpPr>
+      <p:grpSpPr>
+        <a:xfrm>
+          <a:off x="0" y="0"/>
+          <a:ext cx="0" cy="0"/>
+          <a:chOff x="0" y="0"/>
+          <a:chExt cx="0" cy="0"/>
+        </a:xfrm>
+      </p:grpSpPr>
+      <p:sp>
+        <p:nvSpPr>
+          <p:cNvPr id="2" name="Title 1">
+            <a:extLst>
+              <a:ext uri="{FF2B5EF4-FFF2-40B4-BE49-F238E27FC236}">
+                <a16:creationId xmlns:a16="http://schemas.microsoft.com/office/drawing/2014/main" id="{B4A36DD0-C9F2-78B8-EED0-D51D1A15C63B}"/>
+              </a:ext>
+            </a:extLst>
+          </p:cNvPr>
+          <p:cNvSpPr>
+            <a:spLocks noGrp="1"/>
+          </p:cNvSpPr>
+          <p:nvPr>
+            <p:ph type="title"/>
+          </p:nvPr>
+        </p:nvSpPr>
+        <p:spPr/>
+        <p:txBody>
+          <a:bodyPr/>
+          <a:lstStyle/>
+          <a:p>
+            <a:r>
+              <a:rPr lang="en-US" dirty="0"/>
+              <a:t>Unique Code</a:t>
+            </a:r>
+          </a:p>
+        </p:txBody>
+      </p:sp>
+      <p:sp>
+        <p:nvSpPr>
+          <p:cNvPr id="3" name="Content Placeholder 2">
+            <a:extLst>
+              <a:ext uri="{FF2B5EF4-FFF2-40B4-BE49-F238E27FC236}">
+                <a16:creationId xmlns:a16="http://schemas.microsoft.com/office/drawing/2014/main" id="{C83D26BD-E2C6-A512-773C-19253914504F}"/>
+              </a:ext>
+            </a:extLst>
+          </p:cNvPr>
+          <p:cNvSpPr>
+            <a:spLocks noGrp="1"/>
+          </p:cNvSpPr>
+          <p:nvPr>
+            <p:ph idx="1"/>
+          </p:nvPr>
+        </p:nvSpPr>
+        <p:spPr/>
+        <p:txBody>
+          <a:bodyPr/>
+          <a:lstStyle/>
+          <a:p>
+            <a:endParaRPr lang="en-US"/>
+          </a:p>
+        </p:txBody>
+      </p:sp>
+    </p:spTree>
+    <p:extLst>
+      <p:ext uri="{BB962C8B-B14F-4D97-AF65-F5344CB8AC3E}">
+        <p14:creationId xmlns:p14="http://schemas.microsoft.com/office/powerpoint/2010/main" val="561876156"/>
+      </p:ext>
+    </p:extLst>
+  </p:cSld>
+  <p:clrMapOvr>
+    <a:masterClrMapping/>
+  </p:clrMapOvr>
+</p:sld>
+</file>
+
+<file path=ppt/slides/slide22.xml><?xml version="1.0" encoding="utf-8"?>
+<p:sld xmlns:a="http://schemas.openxmlformats.org/drawingml/2006/main" xmlns:r="http://schemas.openxmlformats.org/officeDocument/2006/relationships" xmlns:p="http://schemas.openxmlformats.org/presentationml/2006/main">
+  <p:cSld>
+    <p:spTree>
+      <p:nvGrpSpPr>
+        <p:cNvPr id="1" name=""/>
+        <p:cNvGrpSpPr/>
+        <p:nvPr/>
+      </p:nvGrpSpPr>
+      <p:grpSpPr>
+        <a:xfrm>
+          <a:off x="0" y="0"/>
+          <a:ext cx="0" cy="0"/>
+          <a:chOff x="0" y="0"/>
+          <a:chExt cx="0" cy="0"/>
+        </a:xfrm>
+      </p:grpSpPr>
+      <p:sp>
+        <p:nvSpPr>
+          <p:cNvPr id="2" name="Title 1">
+            <a:extLst>
+              <a:ext uri="{FF2B5EF4-FFF2-40B4-BE49-F238E27FC236}">
+                <a16:creationId xmlns:a16="http://schemas.microsoft.com/office/drawing/2014/main" id="{9462D43B-3011-C58F-D510-4B5932F13B8B}"/>
+              </a:ext>
+            </a:extLst>
+          </p:cNvPr>
+          <p:cNvSpPr>
+            <a:spLocks noGrp="1"/>
+          </p:cNvSpPr>
+          <p:nvPr>
+            <p:ph type="title"/>
+          </p:nvPr>
+        </p:nvSpPr>
+        <p:spPr/>
+        <p:txBody>
+          <a:bodyPr/>
+          <a:lstStyle/>
+          <a:p>
+            <a:r>
+              <a:rPr lang="en-US" dirty="0"/>
+              <a:t>What Went Wrong</a:t>
+            </a:r>
+          </a:p>
+        </p:txBody>
+      </p:sp>
+      <p:sp>
+        <p:nvSpPr>
+          <p:cNvPr id="3" name="Content Placeholder 2">
+            <a:extLst>
+              <a:ext uri="{FF2B5EF4-FFF2-40B4-BE49-F238E27FC236}">
+                <a16:creationId xmlns:a16="http://schemas.microsoft.com/office/drawing/2014/main" id="{5DA649F5-489E-147F-2C62-6E09BB8926DA}"/>
+              </a:ext>
+            </a:extLst>
+          </p:cNvPr>
+          <p:cNvSpPr>
+            <a:spLocks noGrp="1"/>
+          </p:cNvSpPr>
+          <p:nvPr>
+            <p:ph idx="1"/>
+          </p:nvPr>
+        </p:nvSpPr>
+        <p:spPr/>
+        <p:txBody>
+          <a:bodyPr/>
+          <a:lstStyle/>
+          <a:p>
+            <a:endParaRPr lang="en-US"/>
+          </a:p>
+        </p:txBody>
+      </p:sp>
+    </p:spTree>
+    <p:extLst>
+      <p:ext uri="{BB962C8B-B14F-4D97-AF65-F5344CB8AC3E}">
+        <p14:creationId xmlns:p14="http://schemas.microsoft.com/office/powerpoint/2010/main" val="3729412645"/>
+      </p:ext>
+    </p:extLst>
+  </p:cSld>
+  <p:clrMapOvr>
+    <a:masterClrMapping/>
+  </p:clrMapOvr>
+</p:sld>
+</file>
+
+<file path=ppt/slides/slide23.xml><?xml version="1.0" encoding="utf-8"?>
+<p:sld xmlns:a="http://schemas.openxmlformats.org/drawingml/2006/main" xmlns:r="http://schemas.openxmlformats.org/officeDocument/2006/relationships" xmlns:p="http://schemas.openxmlformats.org/presentationml/2006/main">
+  <p:cSld>
+    <p:spTree>
+      <p:nvGrpSpPr>
+        <p:cNvPr id="1" name=""/>
+        <p:cNvGrpSpPr/>
+        <p:nvPr/>
+      </p:nvGrpSpPr>
+      <p:grpSpPr>
+        <a:xfrm>
+          <a:off x="0" y="0"/>
+          <a:ext cx="0" cy="0"/>
+          <a:chOff x="0" y="0"/>
+          <a:chExt cx="0" cy="0"/>
+        </a:xfrm>
+      </p:grpSpPr>
+      <p:sp>
+        <p:nvSpPr>
+          <p:cNvPr id="2" name="Title 1">
+            <a:extLst>
+              <a:ext uri="{FF2B5EF4-FFF2-40B4-BE49-F238E27FC236}">
+                <a16:creationId xmlns:a16="http://schemas.microsoft.com/office/drawing/2014/main" id="{2206033D-92BA-1233-7D7A-30B49DCB9070}"/>
+              </a:ext>
+            </a:extLst>
+          </p:cNvPr>
+          <p:cNvSpPr>
+            <a:spLocks noGrp="1"/>
+          </p:cNvSpPr>
+          <p:nvPr>
+            <p:ph type="title"/>
+          </p:nvPr>
+        </p:nvSpPr>
+        <p:spPr/>
+        <p:txBody>
+          <a:bodyPr/>
+          <a:lstStyle/>
+          <a:p>
+            <a:r>
+              <a:rPr lang="en-US" dirty="0"/>
+              <a:t>What Went Right</a:t>
+            </a:r>
+          </a:p>
+        </p:txBody>
+      </p:sp>
+      <p:sp>
+        <p:nvSpPr>
+          <p:cNvPr id="3" name="Content Placeholder 2">
+            <a:extLst>
+              <a:ext uri="{FF2B5EF4-FFF2-40B4-BE49-F238E27FC236}">
+                <a16:creationId xmlns:a16="http://schemas.microsoft.com/office/drawing/2014/main" id="{BA092BB6-6BD9-6BB4-EE31-08F7F6C774B5}"/>
+              </a:ext>
+            </a:extLst>
+          </p:cNvPr>
+          <p:cNvSpPr>
+            <a:spLocks noGrp="1"/>
+          </p:cNvSpPr>
+          <p:nvPr>
+            <p:ph idx="1"/>
+          </p:nvPr>
+        </p:nvSpPr>
+        <p:spPr/>
+        <p:txBody>
+          <a:bodyPr/>
+          <a:lstStyle/>
+          <a:p>
+            <a:pPr lvl="0"/>
+            <a:r>
+              <a:rPr lang="en-US" dirty="0"/>
+              <a:t>We maintained strong communication and consistently stayed in touch throughout the project.</a:t>
+            </a:r>
+          </a:p>
+          <a:p>
+            <a:pPr lvl="0"/>
+            <a:r>
+              <a:rPr lang="en-US" dirty="0"/>
+              <a:t>We used GitHub effectively and followed a well-organized, structured branching system.</a:t>
+            </a:r>
+          </a:p>
+          <a:p>
+            <a:pPr lvl="0"/>
+            <a:r>
+              <a:rPr lang="en-US" dirty="0"/>
+              <a:t>We worked hard to meet the client’s expectations and quickly implemented any changes or feedback they requested.</a:t>
+            </a:r>
+          </a:p>
+          <a:p>
+            <a:pPr lvl="0"/>
+            <a:r>
+              <a:rPr lang="en-US" dirty="0"/>
+              <a:t>We divided the workload fairly and consistently completed our assigned tasks on schedule.</a:t>
+            </a:r>
+          </a:p>
+        </p:txBody>
+      </p:sp>
+    </p:spTree>
+    <p:extLst>
+      <p:ext uri="{BB962C8B-B14F-4D97-AF65-F5344CB8AC3E}">
+        <p14:creationId xmlns:p14="http://schemas.microsoft.com/office/powerpoint/2010/main" val="3385503980"/>
+      </p:ext>
+    </p:extLst>
+  </p:cSld>
+  <p:clrMapOvr>
+    <a:masterClrMapping/>
+  </p:clrMapOvr>
+</p:sld>
+</file>
+
+<file path=ppt/slides/slide24.xml><?xml version="1.0" encoding="utf-8"?>
+<p:sld xmlns:a="http://schemas.openxmlformats.org/drawingml/2006/main" xmlns:r="http://schemas.openxmlformats.org/officeDocument/2006/relationships" xmlns:p="http://schemas.openxmlformats.org/presentationml/2006/main">
+  <p:cSld>
+    <p:spTree>
+      <p:nvGrpSpPr>
+        <p:cNvPr id="1" name=""/>
+        <p:cNvGrpSpPr/>
+        <p:nvPr/>
+      </p:nvGrpSpPr>
+      <p:grpSpPr>
+        <a:xfrm>
+          <a:off x="0" y="0"/>
+          <a:ext cx="0" cy="0"/>
+          <a:chOff x="0" y="0"/>
+          <a:chExt cx="0" cy="0"/>
+        </a:xfrm>
+      </p:grpSpPr>
+      <p:sp>
+        <p:nvSpPr>
+          <p:cNvPr id="2" name="Title 1">
+            <a:extLst>
+              <a:ext uri="{FF2B5EF4-FFF2-40B4-BE49-F238E27FC236}">
+                <a16:creationId xmlns:a16="http://schemas.microsoft.com/office/drawing/2014/main" id="{6819A3E2-CCE4-8CAA-D340-502D205B09C4}"/>
+              </a:ext>
+            </a:extLst>
+          </p:cNvPr>
+          <p:cNvSpPr>
+            <a:spLocks noGrp="1"/>
+          </p:cNvSpPr>
+          <p:nvPr>
+            <p:ph type="title"/>
+          </p:nvPr>
+        </p:nvSpPr>
+        <p:spPr/>
+        <p:txBody>
+          <a:bodyPr/>
+          <a:lstStyle/>
+          <a:p>
+            <a:r>
+              <a:rPr lang="en-US" dirty="0"/>
+              <a:t>Lessons Learned As A Team</a:t>
+            </a:r>
+          </a:p>
+        </p:txBody>
+      </p:sp>
+      <p:sp>
+        <p:nvSpPr>
+          <p:cNvPr id="3" name="Content Placeholder 2">
+            <a:extLst>
+              <a:ext uri="{FF2B5EF4-FFF2-40B4-BE49-F238E27FC236}">
+                <a16:creationId xmlns:a16="http://schemas.microsoft.com/office/drawing/2014/main" id="{2D9E241C-3C59-D4F4-FF20-C023B4DC8181}"/>
+              </a:ext>
+            </a:extLst>
+          </p:cNvPr>
+          <p:cNvSpPr>
+            <a:spLocks noGrp="1"/>
+          </p:cNvSpPr>
+          <p:nvPr>
+            <p:ph idx="1"/>
+          </p:nvPr>
+        </p:nvSpPr>
+        <p:spPr/>
+        <p:txBody>
+          <a:bodyPr/>
+          <a:lstStyle/>
+          <a:p>
+            <a:endParaRPr lang="en-US" dirty="0"/>
+          </a:p>
+        </p:txBody>
+      </p:sp>
+    </p:spTree>
+    <p:extLst>
+      <p:ext uri="{BB962C8B-B14F-4D97-AF65-F5344CB8AC3E}">
+        <p14:creationId xmlns:p14="http://schemas.microsoft.com/office/powerpoint/2010/main" val="1375510909"/>
+      </p:ext>
+    </p:extLst>
+  </p:cSld>
+  <p:clrMapOvr>
+    <a:masterClrMapping/>
+  </p:clrMapOvr>
+</p:sld>
+</file>
+
+<file path=ppt/slides/slide25.xml><?xml version="1.0" encoding="utf-8"?>
+<p:sld xmlns:a="http://schemas.openxmlformats.org/drawingml/2006/main" xmlns:r="http://schemas.openxmlformats.org/officeDocument/2006/relationships" xmlns:p="http://schemas.openxmlformats.org/presentationml/2006/main">
+  <p:cSld>
+    <p:spTree>
+      <p:nvGrpSpPr>
+        <p:cNvPr id="1" name=""/>
+        <p:cNvGrpSpPr/>
+        <p:nvPr/>
+      </p:nvGrpSpPr>
+      <p:grpSpPr>
+        <a:xfrm>
+          <a:off x="0" y="0"/>
+          <a:ext cx="0" cy="0"/>
+          <a:chOff x="0" y="0"/>
+          <a:chExt cx="0" cy="0"/>
+        </a:xfrm>
+      </p:grpSpPr>
+      <p:sp>
+        <p:nvSpPr>
+          <p:cNvPr id="2" name="Title 1">
+            <a:extLst>
+              <a:ext uri="{FF2B5EF4-FFF2-40B4-BE49-F238E27FC236}">
+                <a16:creationId xmlns:a16="http://schemas.microsoft.com/office/drawing/2014/main" id="{AAF170B3-B48E-3B6C-6C79-5428DE577240}"/>
+              </a:ext>
+            </a:extLst>
+          </p:cNvPr>
+          <p:cNvSpPr>
+            <a:spLocks noGrp="1"/>
+          </p:cNvSpPr>
+          <p:nvPr>
+            <p:ph type="title"/>
+          </p:nvPr>
+        </p:nvSpPr>
+        <p:spPr/>
+        <p:txBody>
+          <a:bodyPr/>
+          <a:lstStyle/>
+          <a:p>
+            <a:r>
+              <a:rPr lang="en-US" dirty="0"/>
+              <a:t>Conclusion</a:t>
+            </a:r>
+          </a:p>
+        </p:txBody>
+      </p:sp>
+      <p:sp>
+        <p:nvSpPr>
+          <p:cNvPr id="3" name="Content Placeholder 2">
+            <a:extLst>
+              <a:ext uri="{FF2B5EF4-FFF2-40B4-BE49-F238E27FC236}">
+                <a16:creationId xmlns:a16="http://schemas.microsoft.com/office/drawing/2014/main" id="{B37CBD76-CA45-9105-C353-2B52B126D8BE}"/>
+              </a:ext>
+            </a:extLst>
+          </p:cNvPr>
+          <p:cNvSpPr>
+            <a:spLocks noGrp="1"/>
+          </p:cNvSpPr>
+          <p:nvPr>
+            <p:ph idx="1"/>
+          </p:nvPr>
+        </p:nvSpPr>
+        <p:spPr/>
+        <p:txBody>
+          <a:bodyPr/>
+          <a:lstStyle/>
+          <a:p>
+            <a:endParaRPr lang="en-US"/>
+          </a:p>
+        </p:txBody>
+      </p:sp>
+    </p:spTree>
+    <p:extLst>
+      <p:ext uri="{BB962C8B-B14F-4D97-AF65-F5344CB8AC3E}">
+        <p14:creationId xmlns:p14="http://schemas.microsoft.com/office/powerpoint/2010/main" val="284288269"/>
       </p:ext>
     </p:extLst>
   </p:cSld>
@@ -6683,7 +7296,31 @@
           <a:bodyPr/>
           <a:lstStyle/>
           <a:p>
-            <a:endParaRPr lang="en-US"/>
+            <a:pPr marL="0" indent="0">
+              <a:buNone/>
+            </a:pPr>
+            <a:r>
+              <a:rPr lang="en-US" dirty="0"/>
+              <a:t>Isaac							Patrice</a:t>
+            </a:r>
+          </a:p>
+          <a:p>
+            <a:endParaRPr lang="en-US" dirty="0"/>
+          </a:p>
+          <a:p>
+            <a:endParaRPr lang="en-US" dirty="0"/>
+          </a:p>
+          <a:p>
+            <a:endParaRPr lang="en-US" dirty="0"/>
+          </a:p>
+          <a:p>
+            <a:pPr marL="0" indent="0">
+              <a:buNone/>
+            </a:pPr>
+            <a:r>
+              <a:rPr lang="en-US" dirty="0"/>
+              <a:t>Jose							Cannon</a:t>
+            </a:r>
           </a:p>
         </p:txBody>
       </p:sp>
@@ -6703,6 +7340,14 @@
 <file path=ppt/slides/slide4.xml><?xml version="1.0" encoding="utf-8"?>
 <p:sld xmlns:a="http://schemas.openxmlformats.org/drawingml/2006/main" xmlns:r="http://schemas.openxmlformats.org/officeDocument/2006/relationships" xmlns:p="http://schemas.openxmlformats.org/presentationml/2006/main">
   <p:cSld>
+    <p:bg>
+      <p:bgPr>
+        <a:solidFill>
+          <a:schemeClr val="bg1"/>
+        </a:solidFill>
+        <a:effectLst/>
+      </p:bgPr>
+    </p:bg>
     <p:spTree>
       <p:nvGrpSpPr>
         <p:cNvPr id="1" name=""/>
@@ -6717,6 +7362,200 @@
           <a:chExt cx="0" cy="0"/>
         </a:xfrm>
       </p:grpSpPr>
+      <p:sp useBgFill="1">
+        <p:nvSpPr>
+          <p:cNvPr id="18" name="Rectangle 17">
+            <a:extLst>
+              <a:ext uri="{FF2B5EF4-FFF2-40B4-BE49-F238E27FC236}">
+                <a16:creationId xmlns:a16="http://schemas.microsoft.com/office/drawing/2014/main" id="{907EF6B7-1338-4443-8C46-6A318D952DFD}"/>
+              </a:ext>
+              <a:ext uri="{C183D7F6-B498-43B3-948B-1728B52AA6E4}">
+                <adec:decorative xmlns:adec="http://schemas.microsoft.com/office/drawing/2017/decorative" val="1"/>
+              </a:ext>
+            </a:extLst>
+          </p:cNvPr>
+          <p:cNvSpPr>
+            <a:spLocks noGrp="1" noRot="1" noChangeAspect="1" noMove="1" noResize="1" noEditPoints="1" noAdjustHandles="1" noChangeArrowheads="1" noChangeShapeType="1" noTextEdit="1"/>
+          </p:cNvSpPr>
+          <p:nvPr>
+            <p:extLst>
+              <p:ext uri="{386F3935-93C4-4BCD-93E2-E3B085C9AB24}">
+                <p16:designElem xmlns:p16="http://schemas.microsoft.com/office/powerpoint/2015/main" val="1"/>
+              </p:ext>
+            </p:extLst>
+          </p:nvPr>
+        </p:nvSpPr>
+        <p:spPr>
+          <a:xfrm>
+            <a:off x="3048" y="0"/>
+            <a:ext cx="12188952" cy="6858000"/>
+          </a:xfrm>
+          <a:prstGeom prst="rect">
+            <a:avLst/>
+          </a:prstGeom>
+          <a:ln>
+            <a:noFill/>
+          </a:ln>
+        </p:spPr>
+        <p:style>
+          <a:lnRef idx="2">
+            <a:schemeClr val="accent1">
+              <a:shade val="50000"/>
+            </a:schemeClr>
+          </a:lnRef>
+          <a:fillRef idx="1">
+            <a:schemeClr val="accent1"/>
+          </a:fillRef>
+          <a:effectRef idx="0">
+            <a:schemeClr val="accent1"/>
+          </a:effectRef>
+          <a:fontRef idx="minor">
+            <a:schemeClr val="lt1"/>
+          </a:fontRef>
+        </p:style>
+        <p:txBody>
+          <a:bodyPr rtlCol="0" anchor="ctr"/>
+          <a:lstStyle/>
+          <a:p>
+            <a:pPr algn="ctr"/>
+            <a:endParaRPr lang="en-US"/>
+          </a:p>
+        </p:txBody>
+      </p:sp>
+      <p:sp>
+        <p:nvSpPr>
+          <p:cNvPr id="19" name="Freeform: Shape 18">
+            <a:extLst>
+              <a:ext uri="{FF2B5EF4-FFF2-40B4-BE49-F238E27FC236}">
+                <a16:creationId xmlns:a16="http://schemas.microsoft.com/office/drawing/2014/main" id="{DAAE4CDD-124C-4DCF-9584-B6033B545DD5}"/>
+              </a:ext>
+              <a:ext uri="{C183D7F6-B498-43B3-948B-1728B52AA6E4}">
+                <adec:decorative xmlns:adec="http://schemas.microsoft.com/office/drawing/2017/decorative" val="1"/>
+              </a:ext>
+            </a:extLst>
+          </p:cNvPr>
+          <p:cNvSpPr>
+            <a:spLocks noGrp="1" noRot="1" noChangeAspect="1" noMove="1" noResize="1" noEditPoints="1" noAdjustHandles="1" noChangeArrowheads="1" noChangeShapeType="1" noTextEdit="1"/>
+          </p:cNvSpPr>
+          <p:nvPr>
+            <p:extLst>
+              <p:ext uri="{386F3935-93C4-4BCD-93E2-E3B085C9AB24}">
+                <p16:designElem xmlns:p16="http://schemas.microsoft.com/office/powerpoint/2015/main" val="1"/>
+              </p:ext>
+            </p:extLst>
+          </p:nvPr>
+        </p:nvSpPr>
+        <p:spPr>
+          <a:xfrm>
+            <a:off x="1" y="0"/>
+            <a:ext cx="4167271" cy="6858000"/>
+          </a:xfrm>
+          <a:custGeom>
+            <a:avLst/>
+            <a:gdLst>
+              <a:gd name="connsiteX0" fmla="*/ 0 w 4167271"/>
+              <a:gd name="connsiteY0" fmla="*/ 0 h 6858000"/>
+              <a:gd name="connsiteX1" fmla="*/ 2259550 w 4167271"/>
+              <a:gd name="connsiteY1" fmla="*/ 0 h 6858000"/>
+              <a:gd name="connsiteX2" fmla="*/ 2387803 w 4167271"/>
+              <a:gd name="connsiteY2" fmla="*/ 82222 h 6858000"/>
+              <a:gd name="connsiteX3" fmla="*/ 4167271 w 4167271"/>
+              <a:gd name="connsiteY3" fmla="*/ 3429000 h 6858000"/>
+              <a:gd name="connsiteX4" fmla="*/ 2387803 w 4167271"/>
+              <a:gd name="connsiteY4" fmla="*/ 6775779 h 6858000"/>
+              <a:gd name="connsiteX5" fmla="*/ 2259550 w 4167271"/>
+              <a:gd name="connsiteY5" fmla="*/ 6858000 h 6858000"/>
+              <a:gd name="connsiteX6" fmla="*/ 0 w 4167271"/>
+              <a:gd name="connsiteY6" fmla="*/ 6858000 h 6858000"/>
+            </a:gdLst>
+            <a:ahLst/>
+            <a:cxnLst>
+              <a:cxn ang="0">
+                <a:pos x="connsiteX0" y="connsiteY0"/>
+              </a:cxn>
+              <a:cxn ang="0">
+                <a:pos x="connsiteX1" y="connsiteY1"/>
+              </a:cxn>
+              <a:cxn ang="0">
+                <a:pos x="connsiteX2" y="connsiteY2"/>
+              </a:cxn>
+              <a:cxn ang="0">
+                <a:pos x="connsiteX3" y="connsiteY3"/>
+              </a:cxn>
+              <a:cxn ang="0">
+                <a:pos x="connsiteX4" y="connsiteY4"/>
+              </a:cxn>
+              <a:cxn ang="0">
+                <a:pos x="connsiteX5" y="connsiteY5"/>
+              </a:cxn>
+              <a:cxn ang="0">
+                <a:pos x="connsiteX6" y="connsiteY6"/>
+              </a:cxn>
+            </a:cxnLst>
+            <a:rect l="l" t="t" r="r" b="b"/>
+            <a:pathLst>
+              <a:path w="4167271" h="6858000">
+                <a:moveTo>
+                  <a:pt x="0" y="0"/>
+                </a:moveTo>
+                <a:lnTo>
+                  <a:pt x="2259550" y="0"/>
+                </a:lnTo>
+                <a:lnTo>
+                  <a:pt x="2387803" y="82222"/>
+                </a:lnTo>
+                <a:cubicBezTo>
+                  <a:pt x="3461407" y="807534"/>
+                  <a:pt x="4167271" y="2035835"/>
+                  <a:pt x="4167271" y="3429000"/>
+                </a:cubicBezTo>
+                <a:cubicBezTo>
+                  <a:pt x="4167271" y="4822165"/>
+                  <a:pt x="3461407" y="6050467"/>
+                  <a:pt x="2387803" y="6775779"/>
+                </a:cubicBezTo>
+                <a:lnTo>
+                  <a:pt x="2259550" y="6858000"/>
+                </a:lnTo>
+                <a:lnTo>
+                  <a:pt x="0" y="6858000"/>
+                </a:lnTo>
+                <a:close/>
+              </a:path>
+            </a:pathLst>
+          </a:custGeom>
+          <a:solidFill>
+            <a:schemeClr val="accent2"/>
+          </a:solidFill>
+          <a:ln>
+            <a:noFill/>
+          </a:ln>
+        </p:spPr>
+        <p:style>
+          <a:lnRef idx="2">
+            <a:schemeClr val="accent1">
+              <a:shade val="50000"/>
+            </a:schemeClr>
+          </a:lnRef>
+          <a:fillRef idx="1">
+            <a:schemeClr val="accent1"/>
+          </a:fillRef>
+          <a:effectRef idx="0">
+            <a:schemeClr val="accent1"/>
+          </a:effectRef>
+          <a:fontRef idx="minor">
+            <a:schemeClr val="lt1"/>
+          </a:fontRef>
+        </p:style>
+        <p:txBody>
+          <a:bodyPr rtlCol="0" anchor="ctr"/>
+          <a:lstStyle/>
+          <a:p>
+            <a:pPr algn="ctr"/>
+            <a:endParaRPr lang="en-US"/>
+          </a:p>
+        </p:txBody>
+      </p:sp>
       <p:sp>
         <p:nvSpPr>
           <p:cNvPr id="2" name="Title 1">
@@ -6733,13 +7572,24 @@
             <p:ph type="title"/>
           </p:nvPr>
         </p:nvSpPr>
-        <p:spPr/>
-        <p:txBody>
-          <a:bodyPr/>
+        <p:spPr>
+          <a:xfrm>
+            <a:off x="686834" y="1153572"/>
+            <a:ext cx="3200400" cy="4461163"/>
+          </a:xfrm>
+        </p:spPr>
+        <p:txBody>
+          <a:bodyPr>
+            <a:normAutofit/>
+          </a:bodyPr>
           <a:lstStyle/>
           <a:p>
             <a:r>
-              <a:rPr lang="en-US" dirty="0"/>
+              <a:rPr lang="en-US">
+                <a:solidFill>
+                  <a:srgbClr val="FFFFFF"/>
+                </a:solidFill>
+              </a:rPr>
               <a:t>Project Overview</a:t>
             </a:r>
           </a:p>
@@ -6747,6 +7597,67 @@
       </p:sp>
       <p:sp>
         <p:nvSpPr>
+          <p:cNvPr id="20" name="Arc 19">
+            <a:extLst>
+              <a:ext uri="{FF2B5EF4-FFF2-40B4-BE49-F238E27FC236}">
+                <a16:creationId xmlns:a16="http://schemas.microsoft.com/office/drawing/2014/main" id="{081E4A58-353D-44AE-B2FC-2A74E2E400F7}"/>
+              </a:ext>
+              <a:ext uri="{C183D7F6-B498-43B3-948B-1728B52AA6E4}">
+                <adec:decorative xmlns:adec="http://schemas.microsoft.com/office/drawing/2017/decorative" val="1"/>
+              </a:ext>
+            </a:extLst>
+          </p:cNvPr>
+          <p:cNvSpPr>
+            <a:spLocks noGrp="1" noRot="1" noChangeAspect="1" noMove="1" noResize="1" noEditPoints="1" noAdjustHandles="1" noChangeArrowheads="1" noChangeShapeType="1" noTextEdit="1"/>
+          </p:cNvSpPr>
+          <p:nvPr>
+            <p:extLst>
+              <p:ext uri="{386F3935-93C4-4BCD-93E2-E3B085C9AB24}">
+                <p16:designElem xmlns:p16="http://schemas.microsoft.com/office/powerpoint/2015/main" val="1"/>
+              </p:ext>
+            </p:extLst>
+          </p:nvPr>
+        </p:nvSpPr>
+        <p:spPr>
+          <a:xfrm flipV="1">
+            <a:off x="7550402" y="2455479"/>
+            <a:ext cx="4083433" cy="4083433"/>
+          </a:xfrm>
+          <a:prstGeom prst="arc">
+            <a:avLst/>
+          </a:prstGeom>
+          <a:ln w="127000" cap="rnd">
+            <a:solidFill>
+              <a:schemeClr val="accent4"/>
+            </a:solidFill>
+            <a:prstDash val="dash"/>
+          </a:ln>
+        </p:spPr>
+        <p:style>
+          <a:lnRef idx="1">
+            <a:schemeClr val="accent1"/>
+          </a:lnRef>
+          <a:fillRef idx="0">
+            <a:schemeClr val="accent1"/>
+          </a:fillRef>
+          <a:effectRef idx="0">
+            <a:schemeClr val="accent1"/>
+          </a:effectRef>
+          <a:fontRef idx="minor">
+            <a:schemeClr val="tx1"/>
+          </a:fontRef>
+        </p:style>
+        <p:txBody>
+          <a:bodyPr rtlCol="0" anchor="ctr"/>
+          <a:lstStyle/>
+          <a:p>
+            <a:pPr algn="ctr"/>
+            <a:endParaRPr lang="en-US" dirty="0"/>
+          </a:p>
+        </p:txBody>
+      </p:sp>
+      <p:sp>
+        <p:nvSpPr>
           <p:cNvPr id="3" name="Content Placeholder 2">
             <a:extLst>
               <a:ext uri="{FF2B5EF4-FFF2-40B4-BE49-F238E27FC236}">
@@ -6761,12 +7672,260 @@
             <p:ph idx="1"/>
           </p:nvPr>
         </p:nvSpPr>
-        <p:spPr/>
-        <p:txBody>
-          <a:bodyPr/>
+        <p:spPr>
+          <a:xfrm>
+            <a:off x="4447308" y="591344"/>
+            <a:ext cx="6906491" cy="5585619"/>
+          </a:xfrm>
+        </p:spPr>
+        <p:txBody>
+          <a:bodyPr anchor="ctr">
+            <a:normAutofit fontScale="85000" lnSpcReduction="20000"/>
+          </a:bodyPr>
           <a:lstStyle/>
           <a:p>
-            <a:endParaRPr lang="en-US"/>
+            <a:pPr lvl="0"/>
+            <a:r>
+              <a:rPr lang="en-US" sz="2000" dirty="0"/>
+              <a:t>Anyone can browse the website without being logging in.</a:t>
+            </a:r>
+          </a:p>
+          <a:p>
+            <a:pPr lvl="0"/>
+            <a:r>
+              <a:rPr lang="en-US" sz="2000" dirty="0"/>
+              <a:t>A user must register or log in before making a reservation.</a:t>
+            </a:r>
+          </a:p>
+          <a:p>
+            <a:pPr lvl="0"/>
+            <a:r>
+              <a:rPr lang="en-US" sz="2000" dirty="0"/>
+              <a:t>Registered users must be stored in a MySQL database.</a:t>
+            </a:r>
+          </a:p>
+          <a:p>
+            <a:pPr lvl="0"/>
+            <a:r>
+              <a:rPr lang="en-US" sz="2000" dirty="0"/>
+              <a:t>Reservations must also be stored in MySQL after the user confirms them.</a:t>
+            </a:r>
+          </a:p>
+          <a:p>
+            <a:pPr lvl="0"/>
+            <a:r>
+              <a:rPr lang="en-US" sz="2000" dirty="0"/>
+              <a:t>The reservation lookup page must retrieve saved reservation information from the database.</a:t>
+            </a:r>
+          </a:p>
+          <a:p>
+            <a:pPr marL="0" indent="0">
+              <a:buNone/>
+            </a:pPr>
+            <a:r>
+              <a:rPr lang="en-US" sz="2000" dirty="0"/>
+              <a:t>The required pages are:</a:t>
+            </a:r>
+          </a:p>
+          <a:p>
+            <a:pPr lvl="0"/>
+            <a:r>
+              <a:rPr lang="en-US" sz="2000" dirty="0"/>
+              <a:t>A landing page for marketing the lodge.</a:t>
+            </a:r>
+          </a:p>
+          <a:p>
+            <a:pPr lvl="0"/>
+            <a:r>
+              <a:rPr lang="en-US" sz="2000" dirty="0"/>
+              <a:t>An About Us page.</a:t>
+            </a:r>
+          </a:p>
+          <a:p>
+            <a:pPr lvl="0"/>
+            <a:r>
+              <a:rPr lang="en-US" sz="2000" dirty="0"/>
+              <a:t>A Contact Us page.</a:t>
+            </a:r>
+          </a:p>
+          <a:p>
+            <a:pPr lvl="0"/>
+            <a:r>
+              <a:rPr lang="en-US" sz="2000" dirty="0"/>
+              <a:t>An Attractions page that includes hiking, kayaking, whale watching, and scuba diving.</a:t>
+            </a:r>
+          </a:p>
+          <a:p>
+            <a:pPr lvl="0"/>
+            <a:r>
+              <a:rPr lang="en-US" sz="2000" dirty="0"/>
+              <a:t>A Registration page.</a:t>
+            </a:r>
+          </a:p>
+          <a:p>
+            <a:pPr lvl="0"/>
+            <a:r>
+              <a:rPr lang="en-US" sz="2000" dirty="0"/>
+              <a:t>A Login page.</a:t>
+            </a:r>
+          </a:p>
+          <a:p>
+            <a:pPr lvl="0"/>
+            <a:r>
+              <a:rPr lang="en-US" sz="2000" dirty="0"/>
+              <a:t>A Reservation/Book Your Vacation page.</a:t>
+            </a:r>
+          </a:p>
+          <a:p>
+            <a:pPr lvl="0"/>
+            <a:r>
+              <a:rPr lang="en-US" sz="2000" dirty="0"/>
+              <a:t>A Reservation Summary page.</a:t>
+            </a:r>
+          </a:p>
+          <a:p>
+            <a:pPr lvl="0"/>
+            <a:r>
+              <a:rPr lang="en-US" sz="2000" dirty="0"/>
+              <a:t>A Reservation Lookup page.</a:t>
+            </a:r>
+          </a:p>
+        </p:txBody>
+      </p:sp>
+      <p:graphicFrame>
+        <p:nvGraphicFramePr>
+          <p:cNvPr id="5" name="Object 4">
+            <a:extLst>
+              <a:ext uri="{FF2B5EF4-FFF2-40B4-BE49-F238E27FC236}">
+                <a16:creationId xmlns:a16="http://schemas.microsoft.com/office/drawing/2014/main" id="{1BCC36B1-AC3D-6BB2-69D2-35B3734BD482}"/>
+              </a:ext>
+            </a:extLst>
+          </p:cNvPr>
+          <p:cNvGraphicFramePr>
+            <a:graphicFrameLocks noChangeAspect="1"/>
+          </p:cNvGraphicFramePr>
+          <p:nvPr>
+            <p:extLst>
+              <p:ext uri="{D42A27DB-BD31-4B8C-83A1-F6EECF244321}">
+                <p14:modId xmlns:p14="http://schemas.microsoft.com/office/powerpoint/2010/main" val="1922914838"/>
+              </p:ext>
+            </p:extLst>
+          </p:nvPr>
+        </p:nvGraphicFramePr>
+        <p:xfrm>
+          <a:off x="76201" y="6176963"/>
+          <a:ext cx="1524000" cy="517525"/>
+        </p:xfrm>
+        <a:graphic>
+          <a:graphicData uri="http://schemas.openxmlformats.org/presentationml/2006/ole">
+            <mc:AlternateContent xmlns:mc="http://schemas.openxmlformats.org/markup-compatibility/2006">
+              <mc:Choice xmlns:v="urn:schemas-microsoft-com:vml" Requires="v">
+                <p:oleObj name="Packager Shell Object" showAsIcon="1" r:id="rId3" imgW="1523858" imgH="517956" progId="Package">
+                  <p:embed/>
+                </p:oleObj>
+              </mc:Choice>
+              <mc:Fallback>
+                <p:oleObj name="Packager Shell Object" showAsIcon="1" r:id="rId3" imgW="1523858" imgH="517956" progId="Package">
+                  <p:embed/>
+                  <p:pic>
+                    <p:nvPicPr>
+                      <p:cNvPr id="0" name=""/>
+                      <p:cNvPicPr/>
+                      <p:nvPr/>
+                    </p:nvPicPr>
+                    <p:blipFill>
+                      <a:blip r:embed="rId4"/>
+                      <a:stretch>
+                        <a:fillRect/>
+                      </a:stretch>
+                    </p:blipFill>
+                    <p:spPr>
+                      <a:xfrm>
+                        <a:off x="76201" y="6176963"/>
+                        <a:ext cx="1524000" cy="517525"/>
+                      </a:xfrm>
+                      <a:prstGeom prst="rect">
+                        <a:avLst/>
+                      </a:prstGeom>
+                    </p:spPr>
+                  </p:pic>
+                </p:oleObj>
+              </mc:Fallback>
+            </mc:AlternateContent>
+          </a:graphicData>
+        </a:graphic>
+      </p:graphicFrame>
+      <p:cxnSp>
+        <p:nvCxnSpPr>
+          <p:cNvPr id="11" name="Connector: Curved 10">
+            <a:extLst>
+              <a:ext uri="{FF2B5EF4-FFF2-40B4-BE49-F238E27FC236}">
+                <a16:creationId xmlns:a16="http://schemas.microsoft.com/office/drawing/2014/main" id="{C0EE568F-4E38-8CEE-7061-4274C8C25452}"/>
+              </a:ext>
+            </a:extLst>
+          </p:cNvPr>
+          <p:cNvCxnSpPr/>
+          <p:nvPr/>
+        </p:nvCxnSpPr>
+        <p:spPr>
+          <a:xfrm rot="10800000" flipV="1">
+            <a:off x="1542616" y="5776819"/>
+            <a:ext cx="894080" cy="690880"/>
+          </a:xfrm>
+          <a:prstGeom prst="curvedConnector3">
+            <a:avLst/>
+          </a:prstGeom>
+          <a:ln>
+            <a:tailEnd type="triangle"/>
+          </a:ln>
+        </p:spPr>
+        <p:style>
+          <a:lnRef idx="2">
+            <a:schemeClr val="accent1"/>
+          </a:lnRef>
+          <a:fillRef idx="0">
+            <a:schemeClr val="accent1"/>
+          </a:fillRef>
+          <a:effectRef idx="1">
+            <a:schemeClr val="accent1"/>
+          </a:effectRef>
+          <a:fontRef idx="minor">
+            <a:schemeClr val="tx1"/>
+          </a:fontRef>
+        </p:style>
+      </p:cxnSp>
+      <p:sp>
+        <p:nvSpPr>
+          <p:cNvPr id="17" name="TextBox 16">
+            <a:extLst>
+              <a:ext uri="{FF2B5EF4-FFF2-40B4-BE49-F238E27FC236}">
+                <a16:creationId xmlns:a16="http://schemas.microsoft.com/office/drawing/2014/main" id="{A53E2BE5-65A7-2EEC-CD5D-1848D544CD30}"/>
+              </a:ext>
+            </a:extLst>
+          </p:cNvPr>
+          <p:cNvSpPr txBox="1"/>
+          <p:nvPr/>
+        </p:nvSpPr>
+        <p:spPr>
+          <a:xfrm>
+            <a:off x="2436696" y="5614735"/>
+            <a:ext cx="894080" cy="577081"/>
+          </a:xfrm>
+          <a:prstGeom prst="rect">
+            <a:avLst/>
+          </a:prstGeom>
+          <a:noFill/>
+        </p:spPr>
+        <p:txBody>
+          <a:bodyPr wrap="square" rtlCol="0">
+            <a:spAutoFit/>
+          </a:bodyPr>
+          <a:lstStyle/>
+          <a:p>
+            <a:r>
+              <a:rPr lang="en-US" sz="1050" dirty="0"/>
+              <a:t>Full Document Here</a:t>
+            </a:r>
           </a:p>
         </p:txBody>
       </p:sp>
@@ -7200,11 +8359,26 @@
         </p:spPr>
         <p:txBody>
           <a:bodyPr anchor="t">
-            <a:normAutofit/>
+            <a:normAutofit fontScale="92500"/>
           </a:bodyPr>
           <a:lstStyle/>
           <a:p>
-            <a:endParaRPr lang="en-US" sz="2200"/>
+            <a:r>
+              <a:rPr lang="en-US" sz="2200" dirty="0"/>
+              <a:t>Contact Messages can be created from users and nonusers. </a:t>
+            </a:r>
+          </a:p>
+          <a:p>
+            <a:r>
+              <a:rPr lang="en-US" sz="2200" dirty="0"/>
+              <a:t>Reservations require Users to login before being created.</a:t>
+            </a:r>
+          </a:p>
+          <a:p>
+            <a:r>
+              <a:rPr lang="en-US" sz="2200" dirty="0"/>
+              <a:t>Roles create a way to give access to employees and admins to guests info/reservations for changes or upgrades.</a:t>
+            </a:r>
           </a:p>
         </p:txBody>
       </p:sp>
@@ -8688,18 +9862,18 @@
 </file>
 
 <file path=customXml/item1.xml><?xml version="1.0" encoding="utf-8"?>
-<p:properties xmlns:p="http://schemas.microsoft.com/office/2006/metadata/properties" xmlns:xsi="http://www.w3.org/2001/XMLSchema-instance" xmlns:pc="http://schemas.microsoft.com/office/infopath/2007/PartnerControls">
-  <documentManagement/>
-</p:properties>
-</file>
-
-<file path=customXml/item2.xml><?xml version="1.0" encoding="utf-8"?>
 <?mso-contentType ?>
 <FormTemplates xmlns="http://schemas.microsoft.com/sharepoint/v3/contenttype/forms">
   <Display>DocumentLibraryForm</Display>
   <Edit>DocumentLibraryForm</Edit>
   <New>DocumentLibraryForm</New>
 </FormTemplates>
+</file>
+
+<file path=customXml/item2.xml><?xml version="1.0" encoding="utf-8"?>
+<p:properties xmlns:p="http://schemas.microsoft.com/office/2006/metadata/properties" xmlns:xsi="http://www.w3.org/2001/XMLSchema-instance" xmlns:pc="http://schemas.microsoft.com/office/infopath/2007/PartnerControls">
+  <documentManagement/>
+</p:properties>
 </file>
 
 <file path=customXml/item3.xml><?xml version="1.0" encoding="utf-8"?>
@@ -8847,6 +10021,14 @@
 </file>
 
 <file path=customXml/itemProps1.xml><?xml version="1.0" encoding="utf-8"?>
+<ds:datastoreItem xmlns:ds="http://schemas.openxmlformats.org/officeDocument/2006/customXml" ds:itemID="{7B3E4DDD-C71A-42C3-98BD-0241D1EA1B3F}">
+  <ds:schemaRefs>
+    <ds:schemaRef ds:uri="http://schemas.microsoft.com/sharepoint/v3/contenttype/forms"/>
+  </ds:schemaRefs>
+</ds:datastoreItem>
+</file>
+
+<file path=customXml/itemProps2.xml><?xml version="1.0" encoding="utf-8"?>
 <ds:datastoreItem xmlns:ds="http://schemas.openxmlformats.org/officeDocument/2006/customXml" ds:itemID="{978688F1-882D-4986-B6BA-3E9868D15E1F}">
   <ds:schemaRefs>
     <ds:schemaRef ds:uri="http://purl.org/dc/terms/"/>
@@ -8858,14 +10040,6 @@
     <ds:schemaRef ds:uri="http://www.w3.org/XML/1998/namespace"/>
     <ds:schemaRef ds:uri="http://schemas.microsoft.com/office/infopath/2007/PartnerControls"/>
     <ds:schemaRef ds:uri="http://purl.org/dc/dcmitype/"/>
-  </ds:schemaRefs>
-</ds:datastoreItem>
-</file>
-
-<file path=customXml/itemProps2.xml><?xml version="1.0" encoding="utf-8"?>
-<ds:datastoreItem xmlns:ds="http://schemas.openxmlformats.org/officeDocument/2006/customXml" ds:itemID="{7B3E4DDD-C71A-42C3-98BD-0241D1EA1B3F}">
-  <ds:schemaRefs>
-    <ds:schemaRef ds:uri="http://schemas.microsoft.com/sharepoint/v3/contenttype/forms"/>
   </ds:schemaRefs>
 </ds:datastoreItem>
 </file>
